--- a/Slides/smt.pptx
+++ b/Slides/smt.pptx
@@ -318,7 +318,7 @@
           <a:p>
             <a:fld id="{A5EC08F4-70F0-B94E-AB10-935034FC2DE7}" type="datetimeFigureOut">
               <a:rPr lang="en-US" smtClean="0"/>
-              <a:t>10/5/19</a:t>
+              <a:t>9/3/25</a:t>
             </a:fld>
             <a:endParaRPr lang="en-US"/>
           </a:p>
@@ -516,7 +516,7 @@
           <a:p>
             <a:fld id="{A5EC08F4-70F0-B94E-AB10-935034FC2DE7}" type="datetimeFigureOut">
               <a:rPr lang="en-US" smtClean="0"/>
-              <a:t>10/5/19</a:t>
+              <a:t>9/3/25</a:t>
             </a:fld>
             <a:endParaRPr lang="en-US"/>
           </a:p>
@@ -724,7 +724,7 @@
           <a:p>
             <a:fld id="{A5EC08F4-70F0-B94E-AB10-935034FC2DE7}" type="datetimeFigureOut">
               <a:rPr lang="en-US" smtClean="0"/>
-              <a:t>10/5/19</a:t>
+              <a:t>9/3/25</a:t>
             </a:fld>
             <a:endParaRPr lang="en-US"/>
           </a:p>
@@ -922,7 +922,7 @@
           <a:p>
             <a:fld id="{A5EC08F4-70F0-B94E-AB10-935034FC2DE7}" type="datetimeFigureOut">
               <a:rPr lang="en-US" smtClean="0"/>
-              <a:t>10/5/19</a:t>
+              <a:t>9/3/25</a:t>
             </a:fld>
             <a:endParaRPr lang="en-US"/>
           </a:p>
@@ -1197,7 +1197,7 @@
           <a:p>
             <a:fld id="{A5EC08F4-70F0-B94E-AB10-935034FC2DE7}" type="datetimeFigureOut">
               <a:rPr lang="en-US" smtClean="0"/>
-              <a:t>10/5/19</a:t>
+              <a:t>9/3/25</a:t>
             </a:fld>
             <a:endParaRPr lang="en-US"/>
           </a:p>
@@ -1462,7 +1462,7 @@
           <a:p>
             <a:fld id="{A5EC08F4-70F0-B94E-AB10-935034FC2DE7}" type="datetimeFigureOut">
               <a:rPr lang="en-US" smtClean="0"/>
-              <a:t>10/5/19</a:t>
+              <a:t>9/3/25</a:t>
             </a:fld>
             <a:endParaRPr lang="en-US"/>
           </a:p>
@@ -1874,7 +1874,7 @@
           <a:p>
             <a:fld id="{A5EC08F4-70F0-B94E-AB10-935034FC2DE7}" type="datetimeFigureOut">
               <a:rPr lang="en-US" smtClean="0"/>
-              <a:t>10/5/19</a:t>
+              <a:t>9/3/25</a:t>
             </a:fld>
             <a:endParaRPr lang="en-US"/>
           </a:p>
@@ -2015,7 +2015,7 @@
           <a:p>
             <a:fld id="{A5EC08F4-70F0-B94E-AB10-935034FC2DE7}" type="datetimeFigureOut">
               <a:rPr lang="en-US" smtClean="0"/>
-              <a:t>10/5/19</a:t>
+              <a:t>9/3/25</a:t>
             </a:fld>
             <a:endParaRPr lang="en-US"/>
           </a:p>
@@ -2128,7 +2128,7 @@
           <a:p>
             <a:fld id="{A5EC08F4-70F0-B94E-AB10-935034FC2DE7}" type="datetimeFigureOut">
               <a:rPr lang="en-US" smtClean="0"/>
-              <a:t>10/5/19</a:t>
+              <a:t>9/3/25</a:t>
             </a:fld>
             <a:endParaRPr lang="en-US"/>
           </a:p>
@@ -2439,7 +2439,7 @@
           <a:p>
             <a:fld id="{A5EC08F4-70F0-B94E-AB10-935034FC2DE7}" type="datetimeFigureOut">
               <a:rPr lang="en-US" smtClean="0"/>
-              <a:t>10/5/19</a:t>
+              <a:t>9/3/25</a:t>
             </a:fld>
             <a:endParaRPr lang="en-US"/>
           </a:p>
@@ -2727,7 +2727,7 @@
           <a:p>
             <a:fld id="{A5EC08F4-70F0-B94E-AB10-935034FC2DE7}" type="datetimeFigureOut">
               <a:rPr lang="en-US" smtClean="0"/>
-              <a:t>10/5/19</a:t>
+              <a:t>9/3/25</a:t>
             </a:fld>
             <a:endParaRPr lang="en-US"/>
           </a:p>
@@ -2968,7 +2968,7 @@
           <a:p>
             <a:fld id="{A5EC08F4-70F0-B94E-AB10-935034FC2DE7}" type="datetimeFigureOut">
               <a:rPr lang="en-US" smtClean="0"/>
-              <a:t>10/5/19</a:t>
+              <a:t>9/3/25</a:t>
             </a:fld>
             <a:endParaRPr lang="en-US"/>
           </a:p>
@@ -3528,8 +3528,8 @@
           </a:p>
         </p:txBody>
       </p:sp>
-      <mc:AlternateContent xmlns:mc="http://schemas.openxmlformats.org/markup-compatibility/2006">
-        <mc:Choice xmlns:a14="http://schemas.microsoft.com/office/drawing/2010/main" Requires="a14">
+      <mc:AlternateContent xmlns:mc="http://schemas.openxmlformats.org/markup-compatibility/2006" xmlns:a14="http://schemas.microsoft.com/office/drawing/2010/main">
+        <mc:Choice Requires="a14">
           <p:sp>
             <p:nvSpPr>
               <p:cNvPr id="5" name="Content Placeholder 4">
@@ -3754,7 +3754,7 @@
             </p:txBody>
           </p:sp>
         </mc:Choice>
-        <mc:Fallback>
+        <mc:Fallback xmlns="">
           <p:sp>
             <p:nvSpPr>
               <p:cNvPr id="5" name="Content Placeholder 4">
@@ -16400,8 +16400,8 @@
           <a:chExt cx="0" cy="0"/>
         </a:xfrm>
       </p:grpSpPr>
-      <mc:AlternateContent xmlns:mc="http://schemas.openxmlformats.org/markup-compatibility/2006">
-        <mc:Choice xmlns:a14="http://schemas.microsoft.com/office/drawing/2010/main" Requires="a14">
+      <mc:AlternateContent xmlns:mc="http://schemas.openxmlformats.org/markup-compatibility/2006" xmlns:a14="http://schemas.microsoft.com/office/drawing/2010/main">
+        <mc:Choice Requires="a14">
           <p:sp>
             <p:nvSpPr>
               <p:cNvPr id="4" name="Content Placeholder 3">
@@ -17642,7 +17642,7 @@
             </p:txBody>
           </p:sp>
         </mc:Choice>
-        <mc:Fallback>
+        <mc:Fallback xmlns="">
           <p:sp>
             <p:nvSpPr>
               <p:cNvPr id="4" name="Content Placeholder 3">
@@ -20387,12 +20387,9 @@
             </a:r>
           </a:p>
           <a:p>
-            <a:r>
-              <a:rPr lang="en-US" dirty="0"/>
-              <a:t>Brief z3 tutorial (see notebook)</a:t>
-            </a:r>
-          </a:p>
-          <a:p>
+            <a:pPr marL="0" indent="0">
+              <a:buNone/>
+            </a:pPr>
             <a:endParaRPr lang="en-US" dirty="0"/>
           </a:p>
           <a:p>
